--- a/output_pptx/Go_Tell_It_On_The_Mountain.pptx
+++ b/output_pptx/Go_Tell_It_On_The_Mountain.pptx
@@ -3113,8 +3113,8 @@
         </p:nvSpPr>
         <p:spPr>
           <a:xfrm>
-            <a:off x="594360" y="1837944"/>
-            <a:ext cx="11002975" cy="685800"/>
+            <a:off x="640080" y="1650492"/>
+            <a:ext cx="10911535" cy="731520"/>
           </a:xfrm>
           <a:prstGeom prst="rect">
             <a:avLst/>
@@ -3129,7 +3129,7 @@
           <a:p>
             <a:pPr algn="ctr"/>
             <a:r>
-              <a:rPr sz="4400" b="1" i="0">
+              <a:rPr sz="4800" b="1" i="0">
                 <a:solidFill>
                   <a:srgbClr val="FFFFFF"/>
                 </a:solidFill>
@@ -3148,8 +3148,8 @@
         </p:nvSpPr>
         <p:spPr>
           <a:xfrm>
-            <a:off x="594360" y="2560320"/>
-            <a:ext cx="11002975" cy="384048"/>
+            <a:off x="640080" y="2418588"/>
+            <a:ext cx="10911535" cy="365760"/>
           </a:xfrm>
           <a:prstGeom prst="rect">
             <a:avLst/>
@@ -3166,7 +3166,7 @@
             <a:r>
               <a:rPr sz="2400" b="0" i="1">
                 <a:solidFill>
-                  <a:srgbClr val="B4B4B4"/>
+                  <a:srgbClr val="AAAAAA"/>
                 </a:solidFill>
                 <a:latin typeface="Arial"/>
               </a:rPr>
@@ -3183,8 +3183,8 @@
         </p:nvSpPr>
         <p:spPr>
           <a:xfrm>
-            <a:off x="594360" y="2980944"/>
-            <a:ext cx="11002975" cy="347472"/>
+            <a:off x="640080" y="2985516"/>
+            <a:ext cx="10911535" cy="731520"/>
           </a:xfrm>
           <a:prstGeom prst="rect">
             <a:avLst/>
@@ -3199,13 +3199,13 @@
           <a:p>
             <a:pPr algn="ctr"/>
             <a:r>
-              <a:rPr sz="2000" b="0" i="1">
-                <a:solidFill>
-                  <a:srgbClr val="8C8C8C"/>
+              <a:rPr sz="4800" b="1" i="0">
+                <a:solidFill>
+                  <a:srgbClr val="FFFFFF"/>
                 </a:solidFill>
                 <a:latin typeface="Arial"/>
               </a:rPr>
-              <a:t/>
+              <a:t>やまもこえ たにこえ</a:t>
             </a:r>
           </a:p>
         </p:txBody>
@@ -3218,8 +3218,8 @@
         </p:nvSpPr>
         <p:spPr>
           <a:xfrm>
-            <a:off x="594360" y="3529584"/>
-            <a:ext cx="11002975" cy="685800"/>
+            <a:off x="640080" y="3753612"/>
+            <a:ext cx="10911535" cy="365760"/>
           </a:xfrm>
           <a:prstGeom prst="rect">
             <a:avLst/>
@@ -3234,83 +3234,13 @@
           <a:p>
             <a:pPr algn="ctr"/>
             <a:r>
-              <a:rPr sz="4400" b="1" i="0">
-                <a:solidFill>
-                  <a:srgbClr val="FFFFFF"/>
-                </a:solidFill>
-                <a:latin typeface="Arial"/>
-              </a:rPr>
-              <a:t>やまもこえ たにこえ</a:t>
-            </a:r>
-          </a:p>
-        </p:txBody>
-      </p:sp>
-      <p:sp>
-        <p:nvSpPr>
-          <p:cNvPr id="6" name="TextBox 5"/>
-          <p:cNvSpPr txBox="1"/>
-          <p:nvPr/>
-        </p:nvSpPr>
-        <p:spPr>
-          <a:xfrm>
-            <a:off x="594360" y="4251960"/>
-            <a:ext cx="11002975" cy="384048"/>
-          </a:xfrm>
-          <a:prstGeom prst="rect">
-            <a:avLst/>
-          </a:prstGeom>
-          <a:noFill/>
-        </p:spPr>
-        <p:txBody>
-          <a:bodyPr wrap="square">
-            <a:spAutoFit/>
-          </a:bodyPr>
-          <a:lstStyle/>
-          <a:p>
-            <a:pPr algn="ctr"/>
-            <a:r>
               <a:rPr sz="2400" b="0" i="1">
                 <a:solidFill>
-                  <a:srgbClr val="B4B4B4"/>
+                  <a:srgbClr val="AAAAAA"/>
                 </a:solidFill>
                 <a:latin typeface="Arial"/>
               </a:rPr>
               <a:t>yama mo koeta ni koe</a:t>
-            </a:r>
-          </a:p>
-        </p:txBody>
-      </p:sp>
-      <p:sp>
-        <p:nvSpPr>
-          <p:cNvPr id="7" name="TextBox 6"/>
-          <p:cNvSpPr txBox="1"/>
-          <p:nvPr/>
-        </p:nvSpPr>
-        <p:spPr>
-          <a:xfrm>
-            <a:off x="594360" y="4672584"/>
-            <a:ext cx="11002975" cy="347472"/>
-          </a:xfrm>
-          <a:prstGeom prst="rect">
-            <a:avLst/>
-          </a:prstGeom>
-          <a:noFill/>
-        </p:spPr>
-        <p:txBody>
-          <a:bodyPr wrap="square">
-            <a:spAutoFit/>
-          </a:bodyPr>
-          <a:lstStyle/>
-          <a:p>
-            <a:pPr algn="ctr"/>
-            <a:r>
-              <a:rPr sz="2000" b="0" i="1">
-                <a:solidFill>
-                  <a:srgbClr val="8C8C8C"/>
-                </a:solidFill>
-                <a:latin typeface="Arial"/>
-              </a:rPr>
-              <a:t/>
             </a:r>
           </a:p>
         </p:txBody>
@@ -3349,8 +3279,8 @@
         </p:nvSpPr>
         <p:spPr>
           <a:xfrm>
-            <a:off x="594360" y="1837944"/>
-            <a:ext cx="11002975" cy="685800"/>
+            <a:off x="640080" y="1650492"/>
+            <a:ext cx="10911535" cy="731520"/>
           </a:xfrm>
           <a:prstGeom prst="rect">
             <a:avLst/>
@@ -3365,7 +3295,7 @@
           <a:p>
             <a:pPr algn="ctr"/>
             <a:r>
-              <a:rPr sz="4400" b="1" i="0">
+              <a:rPr sz="4800" b="1" i="0">
                 <a:solidFill>
                   <a:srgbClr val="FFFFFF"/>
                 </a:solidFill>
@@ -3384,8 +3314,8 @@
         </p:nvSpPr>
         <p:spPr>
           <a:xfrm>
-            <a:off x="594360" y="2560320"/>
-            <a:ext cx="11002975" cy="384048"/>
+            <a:off x="640080" y="2418588"/>
+            <a:ext cx="10911535" cy="365760"/>
           </a:xfrm>
           <a:prstGeom prst="rect">
             <a:avLst/>
@@ -3402,7 +3332,7 @@
             <a:r>
               <a:rPr sz="2400" b="0" i="1">
                 <a:solidFill>
-                  <a:srgbClr val="B4B4B4"/>
+                  <a:srgbClr val="AAAAAA"/>
                 </a:solidFill>
                 <a:latin typeface="Arial"/>
               </a:rPr>
@@ -3419,8 +3349,8 @@
         </p:nvSpPr>
         <p:spPr>
           <a:xfrm>
-            <a:off x="594360" y="2980944"/>
-            <a:ext cx="11002975" cy="347472"/>
+            <a:off x="640080" y="2985516"/>
+            <a:ext cx="10911535" cy="731520"/>
           </a:xfrm>
           <a:prstGeom prst="rect">
             <a:avLst/>
@@ -3435,13 +3365,13 @@
           <a:p>
             <a:pPr algn="ctr"/>
             <a:r>
-              <a:rPr sz="2000" b="0" i="1">
-                <a:solidFill>
-                  <a:srgbClr val="8C8C8C"/>
+              <a:rPr sz="4800" b="1" i="0">
+                <a:solidFill>
+                  <a:srgbClr val="FFFFFF"/>
                 </a:solidFill>
                 <a:latin typeface="Arial"/>
               </a:rPr>
-              <a:t/>
+              <a:t>しゅはこられた</a:t>
             </a:r>
           </a:p>
         </p:txBody>
@@ -3454,8 +3384,8 @@
         </p:nvSpPr>
         <p:spPr>
           <a:xfrm>
-            <a:off x="594360" y="3529584"/>
-            <a:ext cx="11002975" cy="685800"/>
+            <a:off x="640080" y="3753612"/>
+            <a:ext cx="10911535" cy="365760"/>
           </a:xfrm>
           <a:prstGeom prst="rect">
             <a:avLst/>
@@ -3470,83 +3400,13 @@
           <a:p>
             <a:pPr algn="ctr"/>
             <a:r>
-              <a:rPr sz="4400" b="1" i="0">
-                <a:solidFill>
-                  <a:srgbClr val="FFFFFF"/>
-                </a:solidFill>
-                <a:latin typeface="Arial"/>
-              </a:rPr>
-              <a:t>しゅはこられた</a:t>
-            </a:r>
-          </a:p>
-        </p:txBody>
-      </p:sp>
-      <p:sp>
-        <p:nvSpPr>
-          <p:cNvPr id="6" name="TextBox 5"/>
-          <p:cNvSpPr txBox="1"/>
-          <p:nvPr/>
-        </p:nvSpPr>
-        <p:spPr>
-          <a:xfrm>
-            <a:off x="594360" y="4251960"/>
-            <a:ext cx="11002975" cy="384048"/>
-          </a:xfrm>
-          <a:prstGeom prst="rect">
-            <a:avLst/>
-          </a:prstGeom>
-          <a:noFill/>
-        </p:spPr>
-        <p:txBody>
-          <a:bodyPr wrap="square">
-            <a:spAutoFit/>
-          </a:bodyPr>
-          <a:lstStyle/>
-          <a:p>
-            <a:pPr algn="ctr"/>
-            <a:r>
               <a:rPr sz="2400" b="0" i="1">
                 <a:solidFill>
-                  <a:srgbClr val="B4B4B4"/>
+                  <a:srgbClr val="AAAAAA"/>
                 </a:solidFill>
                 <a:latin typeface="Arial"/>
               </a:rPr>
               <a:t>shu wa korareta</a:t>
-            </a:r>
-          </a:p>
-        </p:txBody>
-      </p:sp>
-      <p:sp>
-        <p:nvSpPr>
-          <p:cNvPr id="7" name="TextBox 6"/>
-          <p:cNvSpPr txBox="1"/>
-          <p:nvPr/>
-        </p:nvSpPr>
-        <p:spPr>
-          <a:xfrm>
-            <a:off x="594360" y="4672584"/>
-            <a:ext cx="11002975" cy="347472"/>
-          </a:xfrm>
-          <a:prstGeom prst="rect">
-            <a:avLst/>
-          </a:prstGeom>
-          <a:noFill/>
-        </p:spPr>
-        <p:txBody>
-          <a:bodyPr wrap="square">
-            <a:spAutoFit/>
-          </a:bodyPr>
-          <a:lstStyle/>
-          <a:p>
-            <a:pPr algn="ctr"/>
-            <a:r>
-              <a:rPr sz="2000" b="0" i="1">
-                <a:solidFill>
-                  <a:srgbClr val="8C8C8C"/>
-                </a:solidFill>
-                <a:latin typeface="Arial"/>
-              </a:rPr>
-              <a:t/>
             </a:r>
           </a:p>
         </p:txBody>
@@ -3585,8 +3445,8 @@
         </p:nvSpPr>
         <p:spPr>
           <a:xfrm>
-            <a:off x="594360" y="1837944"/>
-            <a:ext cx="11002975" cy="685800"/>
+            <a:off x="640080" y="1650492"/>
+            <a:ext cx="10911535" cy="731520"/>
           </a:xfrm>
           <a:prstGeom prst="rect">
             <a:avLst/>
@@ -3601,7 +3461,7 @@
           <a:p>
             <a:pPr algn="ctr"/>
             <a:r>
-              <a:rPr sz="4400" b="1" i="0">
+              <a:rPr sz="4800" b="1" i="0">
                 <a:solidFill>
                   <a:srgbClr val="FFFFFF"/>
                 </a:solidFill>
@@ -3620,8 +3480,8 @@
         </p:nvSpPr>
         <p:spPr>
           <a:xfrm>
-            <a:off x="594360" y="2560320"/>
-            <a:ext cx="11002975" cy="384048"/>
+            <a:off x="640080" y="2418588"/>
+            <a:ext cx="10911535" cy="365760"/>
           </a:xfrm>
           <a:prstGeom prst="rect">
             <a:avLst/>
@@ -3638,7 +3498,7 @@
             <a:r>
               <a:rPr sz="2400" b="0" i="1">
                 <a:solidFill>
-                  <a:srgbClr val="B4B4B4"/>
+                  <a:srgbClr val="AAAAAA"/>
                 </a:solidFill>
                 <a:latin typeface="Arial"/>
               </a:rPr>
@@ -3655,8 +3515,8 @@
         </p:nvSpPr>
         <p:spPr>
           <a:xfrm>
-            <a:off x="594360" y="2980944"/>
-            <a:ext cx="11002975" cy="347472"/>
+            <a:off x="640080" y="2985516"/>
+            <a:ext cx="10911535" cy="731520"/>
           </a:xfrm>
           <a:prstGeom prst="rect">
             <a:avLst/>
@@ -3671,13 +3531,13 @@
           <a:p>
             <a:pPr algn="ctr"/>
             <a:r>
-              <a:rPr sz="2000" b="0" i="1">
-                <a:solidFill>
-                  <a:srgbClr val="8C8C8C"/>
+              <a:rPr sz="4800" b="1" i="0">
+                <a:solidFill>
+                  <a:srgbClr val="FFFFFF"/>
                 </a:solidFill>
                 <a:latin typeface="Arial"/>
               </a:rPr>
-              <a:t/>
+              <a:t>しゅはこられた</a:t>
             </a:r>
           </a:p>
         </p:txBody>
@@ -3690,8 +3550,8 @@
         </p:nvSpPr>
         <p:spPr>
           <a:xfrm>
-            <a:off x="594360" y="3529584"/>
-            <a:ext cx="11002975" cy="685800"/>
+            <a:off x="640080" y="3753612"/>
+            <a:ext cx="10911535" cy="365760"/>
           </a:xfrm>
           <a:prstGeom prst="rect">
             <a:avLst/>
@@ -3706,83 +3566,13 @@
           <a:p>
             <a:pPr algn="ctr"/>
             <a:r>
-              <a:rPr sz="4400" b="1" i="0">
-                <a:solidFill>
-                  <a:srgbClr val="FFFFFF"/>
-                </a:solidFill>
-                <a:latin typeface="Arial"/>
-              </a:rPr>
-              <a:t>しゅはこられた</a:t>
-            </a:r>
-          </a:p>
-        </p:txBody>
-      </p:sp>
-      <p:sp>
-        <p:nvSpPr>
-          <p:cNvPr id="6" name="TextBox 5"/>
-          <p:cNvSpPr txBox="1"/>
-          <p:nvPr/>
-        </p:nvSpPr>
-        <p:spPr>
-          <a:xfrm>
-            <a:off x="594360" y="4251960"/>
-            <a:ext cx="11002975" cy="384048"/>
-          </a:xfrm>
-          <a:prstGeom prst="rect">
-            <a:avLst/>
-          </a:prstGeom>
-          <a:noFill/>
-        </p:spPr>
-        <p:txBody>
-          <a:bodyPr wrap="square">
-            <a:spAutoFit/>
-          </a:bodyPr>
-          <a:lstStyle/>
-          <a:p>
-            <a:pPr algn="ctr"/>
-            <a:r>
               <a:rPr sz="2400" b="0" i="1">
                 <a:solidFill>
-                  <a:srgbClr val="B4B4B4"/>
+                  <a:srgbClr val="AAAAAA"/>
                 </a:solidFill>
                 <a:latin typeface="Arial"/>
               </a:rPr>
               <a:t>shu wa korareta</a:t>
-            </a:r>
-          </a:p>
-        </p:txBody>
-      </p:sp>
-      <p:sp>
-        <p:nvSpPr>
-          <p:cNvPr id="7" name="TextBox 6"/>
-          <p:cNvSpPr txBox="1"/>
-          <p:nvPr/>
-        </p:nvSpPr>
-        <p:spPr>
-          <a:xfrm>
-            <a:off x="594360" y="4672584"/>
-            <a:ext cx="11002975" cy="347472"/>
-          </a:xfrm>
-          <a:prstGeom prst="rect">
-            <a:avLst/>
-          </a:prstGeom>
-          <a:noFill/>
-        </p:spPr>
-        <p:txBody>
-          <a:bodyPr wrap="square">
-            <a:spAutoFit/>
-          </a:bodyPr>
-          <a:lstStyle/>
-          <a:p>
-            <a:pPr algn="ctr"/>
-            <a:r>
-              <a:rPr sz="2000" b="0" i="1">
-                <a:solidFill>
-                  <a:srgbClr val="8C8C8C"/>
-                </a:solidFill>
-                <a:latin typeface="Arial"/>
-              </a:rPr>
-              <a:t/>
             </a:r>
           </a:p>
         </p:txBody>
@@ -3821,8 +3611,8 @@
         </p:nvSpPr>
         <p:spPr>
           <a:xfrm>
-            <a:off x="594360" y="2258568"/>
-            <a:ext cx="11002975" cy="685800"/>
+            <a:off x="640080" y="2052828"/>
+            <a:ext cx="10911535" cy="731520"/>
           </a:xfrm>
           <a:prstGeom prst="rect">
             <a:avLst/>
@@ -3837,7 +3627,7 @@
           <a:p>
             <a:pPr algn="ctr"/>
             <a:r>
-              <a:rPr sz="4400" b="1" i="0">
+              <a:rPr sz="4800" b="1" i="0">
                 <a:solidFill>
                   <a:srgbClr val="FFFFFF"/>
                 </a:solidFill>
@@ -3856,8 +3646,8 @@
         </p:nvSpPr>
         <p:spPr>
           <a:xfrm>
-            <a:off x="594360" y="2980944"/>
-            <a:ext cx="11002975" cy="347472"/>
+            <a:off x="640080" y="2985516"/>
+            <a:ext cx="10911535" cy="731520"/>
           </a:xfrm>
           <a:prstGeom prst="rect">
             <a:avLst/>
@@ -3872,83 +3662,13 @@
           <a:p>
             <a:pPr algn="ctr"/>
             <a:r>
-              <a:rPr sz="2200" b="0" i="1">
-                <a:solidFill>
-                  <a:srgbClr val="8C8C8C"/>
-                </a:solidFill>
-                <a:latin typeface="Arial"/>
-              </a:rPr>
-              <a:t/>
-            </a:r>
-          </a:p>
-        </p:txBody>
-      </p:sp>
-      <p:sp>
-        <p:nvSpPr>
-          <p:cNvPr id="4" name="TextBox 3"/>
-          <p:cNvSpPr txBox="1"/>
-          <p:nvPr/>
-        </p:nvSpPr>
-        <p:spPr>
-          <a:xfrm>
-            <a:off x="594360" y="3529584"/>
-            <a:ext cx="11002975" cy="685800"/>
-          </a:xfrm>
-          <a:prstGeom prst="rect">
-            <a:avLst/>
-          </a:prstGeom>
-          <a:noFill/>
-        </p:spPr>
-        <p:txBody>
-          <a:bodyPr wrap="square">
-            <a:spAutoFit/>
-          </a:bodyPr>
-          <a:lstStyle/>
-          <a:p>
-            <a:pPr algn="ctr"/>
-            <a:r>
-              <a:rPr sz="4400" b="1" i="0">
+              <a:rPr sz="4800" b="1" i="0">
                 <a:solidFill>
                   <a:srgbClr val="FFFFFF"/>
                 </a:solidFill>
                 <a:latin typeface="Arial"/>
               </a:rPr>
               <a:t>No monte ou onde estiver</a:t>
-            </a:r>
-          </a:p>
-        </p:txBody>
-      </p:sp>
-      <p:sp>
-        <p:nvSpPr>
-          <p:cNvPr id="5" name="TextBox 4"/>
-          <p:cNvSpPr txBox="1"/>
-          <p:nvPr/>
-        </p:nvSpPr>
-        <p:spPr>
-          <a:xfrm>
-            <a:off x="594360" y="4251960"/>
-            <a:ext cx="11002975" cy="347472"/>
-          </a:xfrm>
-          <a:prstGeom prst="rect">
-            <a:avLst/>
-          </a:prstGeom>
-          <a:noFill/>
-        </p:spPr>
-        <p:txBody>
-          <a:bodyPr wrap="square">
-            <a:spAutoFit/>
-          </a:bodyPr>
-          <a:lstStyle/>
-          <a:p>
-            <a:pPr algn="ctr"/>
-            <a:r>
-              <a:rPr sz="2200" b="0" i="1">
-                <a:solidFill>
-                  <a:srgbClr val="8C8C8C"/>
-                </a:solidFill>
-                <a:latin typeface="Arial"/>
-              </a:rPr>
-              <a:t/>
             </a:r>
           </a:p>
         </p:txBody>
@@ -3987,8 +3707,8 @@
         </p:nvSpPr>
         <p:spPr>
           <a:xfrm>
-            <a:off x="594360" y="2258568"/>
-            <a:ext cx="11002975" cy="685800"/>
+            <a:off x="640080" y="2052828"/>
+            <a:ext cx="10911535" cy="731520"/>
           </a:xfrm>
           <a:prstGeom prst="rect">
             <a:avLst/>
@@ -4003,7 +3723,7 @@
           <a:p>
             <a:pPr algn="ctr"/>
             <a:r>
-              <a:rPr sz="4400" b="1" i="0">
+              <a:rPr sz="4800" b="1" i="0">
                 <a:solidFill>
                   <a:srgbClr val="FFFFFF"/>
                 </a:solidFill>
@@ -4022,8 +3742,8 @@
         </p:nvSpPr>
         <p:spPr>
           <a:xfrm>
-            <a:off x="594360" y="2980944"/>
-            <a:ext cx="11002975" cy="347472"/>
+            <a:off x="640080" y="2985516"/>
+            <a:ext cx="10911535" cy="731520"/>
           </a:xfrm>
           <a:prstGeom prst="rect">
             <a:avLst/>
@@ -4038,83 +3758,13 @@
           <a:p>
             <a:pPr algn="ctr"/>
             <a:r>
-              <a:rPr sz="2200" b="0" i="1">
-                <a:solidFill>
-                  <a:srgbClr val="8C8C8C"/>
-                </a:solidFill>
-                <a:latin typeface="Arial"/>
-              </a:rPr>
-              <a:t/>
-            </a:r>
-          </a:p>
-        </p:txBody>
-      </p:sp>
-      <p:sp>
-        <p:nvSpPr>
-          <p:cNvPr id="4" name="TextBox 3"/>
-          <p:cNvSpPr txBox="1"/>
-          <p:nvPr/>
-        </p:nvSpPr>
-        <p:spPr>
-          <a:xfrm>
-            <a:off x="594360" y="3529584"/>
-            <a:ext cx="11002975" cy="685800"/>
-          </a:xfrm>
-          <a:prstGeom prst="rect">
-            <a:avLst/>
-          </a:prstGeom>
-          <a:noFill/>
-        </p:spPr>
-        <p:txBody>
-          <a:bodyPr wrap="square">
-            <a:spAutoFit/>
-          </a:bodyPr>
-          <a:lstStyle/>
-          <a:p>
-            <a:pPr algn="ctr"/>
-            <a:r>
-              <a:rPr sz="4400" b="1" i="0">
+              <a:rPr sz="4800" b="1" i="0">
                 <a:solidFill>
                   <a:srgbClr val="FFFFFF"/>
                 </a:solidFill>
                 <a:latin typeface="Arial"/>
               </a:rPr>
               <a:t>Que Cristo já nasceu</a:t>
-            </a:r>
-          </a:p>
-        </p:txBody>
-      </p:sp>
-      <p:sp>
-        <p:nvSpPr>
-          <p:cNvPr id="5" name="TextBox 4"/>
-          <p:cNvSpPr txBox="1"/>
-          <p:nvPr/>
-        </p:nvSpPr>
-        <p:spPr>
-          <a:xfrm>
-            <a:off x="594360" y="4251960"/>
-            <a:ext cx="11002975" cy="347472"/>
-          </a:xfrm>
-          <a:prstGeom prst="rect">
-            <a:avLst/>
-          </a:prstGeom>
-          <a:noFill/>
-        </p:spPr>
-        <p:txBody>
-          <a:bodyPr wrap="square">
-            <a:spAutoFit/>
-          </a:bodyPr>
-          <a:lstStyle/>
-          <a:p>
-            <a:pPr algn="ctr"/>
-            <a:r>
-              <a:rPr sz="2200" b="0" i="1">
-                <a:solidFill>
-                  <a:srgbClr val="8C8C8C"/>
-                </a:solidFill>
-                <a:latin typeface="Arial"/>
-              </a:rPr>
-              <a:t/>
             </a:r>
           </a:p>
         </p:txBody>
@@ -4153,8 +3803,8 @@
         </p:nvSpPr>
         <p:spPr>
           <a:xfrm>
-            <a:off x="594360" y="1837944"/>
-            <a:ext cx="11002975" cy="685800"/>
+            <a:off x="640080" y="1650492"/>
+            <a:ext cx="10911535" cy="731520"/>
           </a:xfrm>
           <a:prstGeom prst="rect">
             <a:avLst/>
@@ -4169,7 +3819,7 @@
           <a:p>
             <a:pPr algn="ctr"/>
             <a:r>
-              <a:rPr sz="4400" b="1" i="0">
+              <a:rPr sz="4800" b="1" i="0">
                 <a:solidFill>
                   <a:srgbClr val="FFFFFF"/>
                 </a:solidFill>
@@ -4188,8 +3838,8 @@
         </p:nvSpPr>
         <p:spPr>
           <a:xfrm>
-            <a:off x="594360" y="2560320"/>
-            <a:ext cx="11002975" cy="384048"/>
+            <a:off x="640080" y="2418588"/>
+            <a:ext cx="10911535" cy="365760"/>
           </a:xfrm>
           <a:prstGeom prst="rect">
             <a:avLst/>
@@ -4206,7 +3856,7 @@
             <a:r>
               <a:rPr sz="2400" b="0" i="1">
                 <a:solidFill>
-                  <a:srgbClr val="B4B4B4"/>
+                  <a:srgbClr val="AAAAAA"/>
                 </a:solidFill>
                 <a:latin typeface="Arial"/>
               </a:rPr>
@@ -4223,8 +3873,8 @@
         </p:nvSpPr>
         <p:spPr>
           <a:xfrm>
-            <a:off x="594360" y="2980944"/>
-            <a:ext cx="11002975" cy="347472"/>
+            <a:off x="640080" y="2985516"/>
+            <a:ext cx="10911535" cy="731520"/>
           </a:xfrm>
           <a:prstGeom prst="rect">
             <a:avLst/>
@@ -4239,13 +3889,13 @@
           <a:p>
             <a:pPr algn="ctr"/>
             <a:r>
-              <a:rPr sz="2000" b="0" i="1">
-                <a:solidFill>
-                  <a:srgbClr val="8C8C8C"/>
+              <a:rPr sz="4800" b="1" i="0">
+                <a:solidFill>
+                  <a:srgbClr val="FFFFFF"/>
                 </a:solidFill>
                 <a:latin typeface="Arial"/>
               </a:rPr>
-              <a:t/>
+              <a:t>ひつじかいに</a:t>
             </a:r>
           </a:p>
         </p:txBody>
@@ -4258,8 +3908,8 @@
         </p:nvSpPr>
         <p:spPr>
           <a:xfrm>
-            <a:off x="594360" y="3529584"/>
-            <a:ext cx="11002975" cy="685800"/>
+            <a:off x="640080" y="3753612"/>
+            <a:ext cx="10911535" cy="365760"/>
           </a:xfrm>
           <a:prstGeom prst="rect">
             <a:avLst/>
@@ -4274,13 +3924,13 @@
           <a:p>
             <a:pPr algn="ctr"/>
             <a:r>
-              <a:rPr sz="4400" b="1" i="0">
-                <a:solidFill>
-                  <a:srgbClr val="FFFFFF"/>
+              <a:rPr sz="2400" b="0" i="1">
+                <a:solidFill>
+                  <a:srgbClr val="AAAAAA"/>
                 </a:solidFill>
                 <a:latin typeface="Arial"/>
               </a:rPr>
-              <a:t>ひつじかいに</a:t>
+              <a:t>hitsuji kai ni</a:t>
             </a:r>
           </a:p>
         </p:txBody>
@@ -4293,8 +3943,8 @@
         </p:nvSpPr>
         <p:spPr>
           <a:xfrm>
-            <a:off x="594360" y="4251960"/>
-            <a:ext cx="11002975" cy="384048"/>
+            <a:off x="640080" y="4530852"/>
+            <a:ext cx="10911535" cy="310896"/>
           </a:xfrm>
           <a:prstGeom prst="rect">
             <a:avLst/>
@@ -4309,13 +3959,13 @@
           <a:p>
             <a:pPr algn="ctr"/>
             <a:r>
-              <a:rPr sz="2400" b="0" i="1">
-                <a:solidFill>
-                  <a:srgbClr val="B4B4B4"/>
+              <a:rPr sz="2000" b="0" i="1">
+                <a:solidFill>
+                  <a:srgbClr val="828282"/>
                 </a:solidFill>
                 <a:latin typeface="Arial"/>
               </a:rPr>
-              <a:t>hitsuji kai ni</a:t>
+              <a:t>Proclame na montanha</a:t>
             </a:r>
           </a:p>
         </p:txBody>
@@ -4328,8 +3978,8 @@
         </p:nvSpPr>
         <p:spPr>
           <a:xfrm>
-            <a:off x="594360" y="4672584"/>
-            <a:ext cx="11002975" cy="347472"/>
+            <a:off x="640080" y="4896612"/>
+            <a:ext cx="10911535" cy="310896"/>
           </a:xfrm>
           <a:prstGeom prst="rect">
             <a:avLst/>
@@ -4346,11 +3996,11 @@
             <a:r>
               <a:rPr sz="2000" b="0" i="1">
                 <a:solidFill>
-                  <a:srgbClr val="8C8C8C"/>
+                  <a:srgbClr val="828282"/>
                 </a:solidFill>
                 <a:latin typeface="Arial"/>
               </a:rPr>
-              <a:t/>
+              <a:t>No monte ou onde estiver</a:t>
             </a:r>
           </a:p>
         </p:txBody>
@@ -4389,8 +4039,8 @@
         </p:nvSpPr>
         <p:spPr>
           <a:xfrm>
-            <a:off x="594360" y="1837944"/>
-            <a:ext cx="11002975" cy="685800"/>
+            <a:off x="640080" y="1650492"/>
+            <a:ext cx="10911535" cy="731520"/>
           </a:xfrm>
           <a:prstGeom prst="rect">
             <a:avLst/>
@@ -4405,7 +4055,7 @@
           <a:p>
             <a:pPr algn="ctr"/>
             <a:r>
-              <a:rPr sz="4400" b="1" i="0">
+              <a:rPr sz="4800" b="1" i="0">
                 <a:solidFill>
                   <a:srgbClr val="FFFFFF"/>
                 </a:solidFill>
@@ -4424,8 +4074,8 @@
         </p:nvSpPr>
         <p:spPr>
           <a:xfrm>
-            <a:off x="594360" y="2560320"/>
-            <a:ext cx="11002975" cy="384048"/>
+            <a:off x="640080" y="2418588"/>
+            <a:ext cx="10911535" cy="365760"/>
           </a:xfrm>
           <a:prstGeom prst="rect">
             <a:avLst/>
@@ -4442,7 +4092,7 @@
             <a:r>
               <a:rPr sz="2400" b="0" i="1">
                 <a:solidFill>
-                  <a:srgbClr val="B4B4B4"/>
+                  <a:srgbClr val="AAAAAA"/>
                 </a:solidFill>
                 <a:latin typeface="Arial"/>
               </a:rPr>
@@ -4459,8 +4109,8 @@
         </p:nvSpPr>
         <p:spPr>
           <a:xfrm>
-            <a:off x="594360" y="2980944"/>
-            <a:ext cx="11002975" cy="347472"/>
+            <a:off x="640080" y="2985516"/>
+            <a:ext cx="10911535" cy="731520"/>
           </a:xfrm>
           <a:prstGeom prst="rect">
             <a:avLst/>
@@ -4475,13 +4125,13 @@
           <a:p>
             <a:pPr algn="ctr"/>
             <a:r>
-              <a:rPr sz="2000" b="0" i="1">
-                <a:solidFill>
-                  <a:srgbClr val="8C8C8C"/>
+              <a:rPr sz="4800" b="1" i="0">
+                <a:solidFill>
+                  <a:srgbClr val="FFFFFF"/>
                 </a:solidFill>
                 <a:latin typeface="Arial"/>
               </a:rPr>
-              <a:t/>
+              <a:t>まばゆいひかり</a:t>
             </a:r>
           </a:p>
         </p:txBody>
@@ -4494,8 +4144,8 @@
         </p:nvSpPr>
         <p:spPr>
           <a:xfrm>
-            <a:off x="594360" y="3529584"/>
-            <a:ext cx="11002975" cy="685800"/>
+            <a:off x="640080" y="3753612"/>
+            <a:ext cx="10911535" cy="365760"/>
           </a:xfrm>
           <a:prstGeom prst="rect">
             <a:avLst/>
@@ -4510,13 +4160,13 @@
           <a:p>
             <a:pPr algn="ctr"/>
             <a:r>
-              <a:rPr sz="4400" b="1" i="0">
-                <a:solidFill>
-                  <a:srgbClr val="FFFFFF"/>
+              <a:rPr sz="2400" b="0" i="1">
+                <a:solidFill>
+                  <a:srgbClr val="AAAAAA"/>
                 </a:solidFill>
                 <a:latin typeface="Arial"/>
               </a:rPr>
-              <a:t>まばゆいひかり</a:t>
+              <a:t>mabayui hikari</a:t>
             </a:r>
           </a:p>
         </p:txBody>
@@ -4529,8 +4179,8 @@
         </p:nvSpPr>
         <p:spPr>
           <a:xfrm>
-            <a:off x="594360" y="4251960"/>
-            <a:ext cx="11002975" cy="384048"/>
+            <a:off x="640080" y="4530852"/>
+            <a:ext cx="10911535" cy="310896"/>
           </a:xfrm>
           <a:prstGeom prst="rect">
             <a:avLst/>
@@ -4545,13 +4195,13 @@
           <a:p>
             <a:pPr algn="ctr"/>
             <a:r>
-              <a:rPr sz="2400" b="0" i="1">
-                <a:solidFill>
-                  <a:srgbClr val="B4B4B4"/>
+              <a:rPr sz="2000" b="0" i="1">
+                <a:solidFill>
+                  <a:srgbClr val="828282"/>
                 </a:solidFill>
                 <a:latin typeface="Arial"/>
               </a:rPr>
-              <a:t>mabayui hikari</a:t>
+              <a:t>Proclaime na montanha</a:t>
             </a:r>
           </a:p>
         </p:txBody>
@@ -4564,8 +4214,8 @@
         </p:nvSpPr>
         <p:spPr>
           <a:xfrm>
-            <a:off x="594360" y="4672584"/>
-            <a:ext cx="11002975" cy="347472"/>
+            <a:off x="640080" y="4896612"/>
+            <a:ext cx="10911535" cy="310896"/>
           </a:xfrm>
           <a:prstGeom prst="rect">
             <a:avLst/>
@@ -4582,11 +4232,11 @@
             <a:r>
               <a:rPr sz="2000" b="0" i="1">
                 <a:solidFill>
-                  <a:srgbClr val="8C8C8C"/>
+                  <a:srgbClr val="828282"/>
                 </a:solidFill>
                 <a:latin typeface="Arial"/>
               </a:rPr>
-              <a:t/>
+              <a:t>Que Cristo já nasceu</a:t>
             </a:r>
           </a:p>
         </p:txBody>
@@ -4625,8 +4275,8 @@
         </p:nvSpPr>
         <p:spPr>
           <a:xfrm>
-            <a:off x="594360" y="1837944"/>
-            <a:ext cx="11002975" cy="685800"/>
+            <a:off x="640080" y="1650492"/>
+            <a:ext cx="10911535" cy="731520"/>
           </a:xfrm>
           <a:prstGeom prst="rect">
             <a:avLst/>
@@ -4641,7 +4291,7 @@
           <a:p>
             <a:pPr algn="ctr"/>
             <a:r>
-              <a:rPr sz="4400" b="1" i="0">
+              <a:rPr sz="4800" b="1" i="0">
                 <a:solidFill>
                   <a:srgbClr val="FFFFFF"/>
                 </a:solidFill>
@@ -4660,8 +4310,8 @@
         </p:nvSpPr>
         <p:spPr>
           <a:xfrm>
-            <a:off x="594360" y="2560320"/>
-            <a:ext cx="11002975" cy="384048"/>
+            <a:off x="640080" y="2418588"/>
+            <a:ext cx="10911535" cy="365760"/>
           </a:xfrm>
           <a:prstGeom prst="rect">
             <a:avLst/>
@@ -4678,7 +4328,7 @@
             <a:r>
               <a:rPr sz="2400" b="0" i="1">
                 <a:solidFill>
-                  <a:srgbClr val="B4B4B4"/>
+                  <a:srgbClr val="AAAAAA"/>
                 </a:solidFill>
                 <a:latin typeface="Arial"/>
               </a:rPr>
@@ -4695,8 +4345,8 @@
         </p:nvSpPr>
         <p:spPr>
           <a:xfrm>
-            <a:off x="594360" y="2980944"/>
-            <a:ext cx="11002975" cy="347472"/>
+            <a:off x="640080" y="2985516"/>
+            <a:ext cx="10911535" cy="731520"/>
           </a:xfrm>
           <a:prstGeom prst="rect">
             <a:avLst/>
@@ -4711,13 +4361,13 @@
           <a:p>
             <a:pPr algn="ctr"/>
             <a:r>
-              <a:rPr sz="2000" b="0" i="1">
-                <a:solidFill>
-                  <a:srgbClr val="8C8C8C"/>
+              <a:rPr sz="4800" b="1" i="0">
+                <a:solidFill>
+                  <a:srgbClr val="FFFFFF"/>
                 </a:solidFill>
                 <a:latin typeface="Arial"/>
               </a:rPr>
-              <a:t/>
+              <a:t>やまもこえ たにこえ</a:t>
             </a:r>
           </a:p>
         </p:txBody>
@@ -4730,8 +4380,8 @@
         </p:nvSpPr>
         <p:spPr>
           <a:xfrm>
-            <a:off x="594360" y="3529584"/>
-            <a:ext cx="11002975" cy="685800"/>
+            <a:off x="640080" y="3753612"/>
+            <a:ext cx="10911535" cy="365760"/>
           </a:xfrm>
           <a:prstGeom prst="rect">
             <a:avLst/>
@@ -4746,83 +4396,13 @@
           <a:p>
             <a:pPr algn="ctr"/>
             <a:r>
-              <a:rPr sz="4400" b="1" i="0">
-                <a:solidFill>
-                  <a:srgbClr val="FFFFFF"/>
-                </a:solidFill>
-                <a:latin typeface="Arial"/>
-              </a:rPr>
-              <a:t>やまもこえ たにこえ</a:t>
-            </a:r>
-          </a:p>
-        </p:txBody>
-      </p:sp>
-      <p:sp>
-        <p:nvSpPr>
-          <p:cNvPr id="6" name="TextBox 5"/>
-          <p:cNvSpPr txBox="1"/>
-          <p:nvPr/>
-        </p:nvSpPr>
-        <p:spPr>
-          <a:xfrm>
-            <a:off x="594360" y="4251960"/>
-            <a:ext cx="11002975" cy="384048"/>
-          </a:xfrm>
-          <a:prstGeom prst="rect">
-            <a:avLst/>
-          </a:prstGeom>
-          <a:noFill/>
-        </p:spPr>
-        <p:txBody>
-          <a:bodyPr wrap="square">
-            <a:spAutoFit/>
-          </a:bodyPr>
-          <a:lstStyle/>
-          <a:p>
-            <a:pPr algn="ctr"/>
-            <a:r>
               <a:rPr sz="2400" b="0" i="1">
                 <a:solidFill>
-                  <a:srgbClr val="B4B4B4"/>
+                  <a:srgbClr val="AAAAAA"/>
                 </a:solidFill>
                 <a:latin typeface="Arial"/>
               </a:rPr>
               <a:t>yama mo koeta ni koe</a:t>
-            </a:r>
-          </a:p>
-        </p:txBody>
-      </p:sp>
-      <p:sp>
-        <p:nvSpPr>
-          <p:cNvPr id="7" name="TextBox 6"/>
-          <p:cNvSpPr txBox="1"/>
-          <p:nvPr/>
-        </p:nvSpPr>
-        <p:spPr>
-          <a:xfrm>
-            <a:off x="594360" y="4672584"/>
-            <a:ext cx="11002975" cy="347472"/>
-          </a:xfrm>
-          <a:prstGeom prst="rect">
-            <a:avLst/>
-          </a:prstGeom>
-          <a:noFill/>
-        </p:spPr>
-        <p:txBody>
-          <a:bodyPr wrap="square">
-            <a:spAutoFit/>
-          </a:bodyPr>
-          <a:lstStyle/>
-          <a:p>
-            <a:pPr algn="ctr"/>
-            <a:r>
-              <a:rPr sz="2000" b="0" i="1">
-                <a:solidFill>
-                  <a:srgbClr val="8C8C8C"/>
-                </a:solidFill>
-                <a:latin typeface="Arial"/>
-              </a:rPr>
-              <a:t/>
             </a:r>
           </a:p>
         </p:txBody>
@@ -4861,8 +4441,8 @@
         </p:nvSpPr>
         <p:spPr>
           <a:xfrm>
-            <a:off x="594360" y="1837944"/>
-            <a:ext cx="11002975" cy="685800"/>
+            <a:off x="640080" y="1650492"/>
+            <a:ext cx="10911535" cy="731520"/>
           </a:xfrm>
           <a:prstGeom prst="rect">
             <a:avLst/>
@@ -4877,7 +4457,7 @@
           <a:p>
             <a:pPr algn="ctr"/>
             <a:r>
-              <a:rPr sz="4400" b="1" i="0">
+              <a:rPr sz="4800" b="1" i="0">
                 <a:solidFill>
                   <a:srgbClr val="FFFFFF"/>
                 </a:solidFill>
@@ -4896,8 +4476,8 @@
         </p:nvSpPr>
         <p:spPr>
           <a:xfrm>
-            <a:off x="594360" y="2560320"/>
-            <a:ext cx="11002975" cy="384048"/>
+            <a:off x="640080" y="2418588"/>
+            <a:ext cx="10911535" cy="365760"/>
           </a:xfrm>
           <a:prstGeom prst="rect">
             <a:avLst/>
@@ -4914,7 +4494,7 @@
             <a:r>
               <a:rPr sz="2400" b="0" i="1">
                 <a:solidFill>
-                  <a:srgbClr val="B4B4B4"/>
+                  <a:srgbClr val="AAAAAA"/>
                 </a:solidFill>
                 <a:latin typeface="Arial"/>
               </a:rPr>
@@ -4931,8 +4511,8 @@
         </p:nvSpPr>
         <p:spPr>
           <a:xfrm>
-            <a:off x="594360" y="2980944"/>
-            <a:ext cx="11002975" cy="347472"/>
+            <a:off x="640080" y="2985516"/>
+            <a:ext cx="10911535" cy="731520"/>
           </a:xfrm>
           <a:prstGeom prst="rect">
             <a:avLst/>
@@ -4947,13 +4527,13 @@
           <a:p>
             <a:pPr algn="ctr"/>
             <a:r>
-              <a:rPr sz="2000" b="0" i="1">
-                <a:solidFill>
-                  <a:srgbClr val="8C8C8C"/>
+              <a:rPr sz="4800" b="1" i="0">
+                <a:solidFill>
+                  <a:srgbClr val="FFFFFF"/>
                 </a:solidFill>
                 <a:latin typeface="Arial"/>
               </a:rPr>
-              <a:t/>
+              <a:t>しゅはこられた</a:t>
             </a:r>
           </a:p>
         </p:txBody>
@@ -4966,8 +4546,8 @@
         </p:nvSpPr>
         <p:spPr>
           <a:xfrm>
-            <a:off x="594360" y="3529584"/>
-            <a:ext cx="11002975" cy="685800"/>
+            <a:off x="640080" y="3753612"/>
+            <a:ext cx="10911535" cy="365760"/>
           </a:xfrm>
           <a:prstGeom prst="rect">
             <a:avLst/>
@@ -4982,83 +4562,13 @@
           <a:p>
             <a:pPr algn="ctr"/>
             <a:r>
-              <a:rPr sz="4400" b="1" i="0">
-                <a:solidFill>
-                  <a:srgbClr val="FFFFFF"/>
-                </a:solidFill>
-                <a:latin typeface="Arial"/>
-              </a:rPr>
-              <a:t>しゅはこられた</a:t>
-            </a:r>
-          </a:p>
-        </p:txBody>
-      </p:sp>
-      <p:sp>
-        <p:nvSpPr>
-          <p:cNvPr id="6" name="TextBox 5"/>
-          <p:cNvSpPr txBox="1"/>
-          <p:nvPr/>
-        </p:nvSpPr>
-        <p:spPr>
-          <a:xfrm>
-            <a:off x="594360" y="4251960"/>
-            <a:ext cx="11002975" cy="384048"/>
-          </a:xfrm>
-          <a:prstGeom prst="rect">
-            <a:avLst/>
-          </a:prstGeom>
-          <a:noFill/>
-        </p:spPr>
-        <p:txBody>
-          <a:bodyPr wrap="square">
-            <a:spAutoFit/>
-          </a:bodyPr>
-          <a:lstStyle/>
-          <a:p>
-            <a:pPr algn="ctr"/>
-            <a:r>
               <a:rPr sz="2400" b="0" i="1">
                 <a:solidFill>
-                  <a:srgbClr val="B4B4B4"/>
+                  <a:srgbClr val="AAAAAA"/>
                 </a:solidFill>
                 <a:latin typeface="Arial"/>
               </a:rPr>
               <a:t>shu wa korareta</a:t>
-            </a:r>
-          </a:p>
-        </p:txBody>
-      </p:sp>
-      <p:sp>
-        <p:nvSpPr>
-          <p:cNvPr id="7" name="TextBox 6"/>
-          <p:cNvSpPr txBox="1"/>
-          <p:nvPr/>
-        </p:nvSpPr>
-        <p:spPr>
-          <a:xfrm>
-            <a:off x="594360" y="4672584"/>
-            <a:ext cx="11002975" cy="347472"/>
-          </a:xfrm>
-          <a:prstGeom prst="rect">
-            <a:avLst/>
-          </a:prstGeom>
-          <a:noFill/>
-        </p:spPr>
-        <p:txBody>
-          <a:bodyPr wrap="square">
-            <a:spAutoFit/>
-          </a:bodyPr>
-          <a:lstStyle/>
-          <a:p>
-            <a:pPr algn="ctr"/>
-            <a:r>
-              <a:rPr sz="2000" b="0" i="1">
-                <a:solidFill>
-                  <a:srgbClr val="8C8C8C"/>
-                </a:solidFill>
-                <a:latin typeface="Arial"/>
-              </a:rPr>
-              <a:t/>
             </a:r>
           </a:p>
         </p:txBody>
@@ -5097,8 +4607,8 @@
         </p:nvSpPr>
         <p:spPr>
           <a:xfrm>
-            <a:off x="594360" y="1837944"/>
-            <a:ext cx="11002975" cy="685800"/>
+            <a:off x="640080" y="1650492"/>
+            <a:ext cx="10911535" cy="731520"/>
           </a:xfrm>
           <a:prstGeom prst="rect">
             <a:avLst/>
@@ -5113,7 +4623,7 @@
           <a:p>
             <a:pPr algn="ctr"/>
             <a:r>
-              <a:rPr sz="4400" b="1" i="0">
+              <a:rPr sz="4800" b="1" i="0">
                 <a:solidFill>
                   <a:srgbClr val="FFFFFF"/>
                 </a:solidFill>
@@ -5132,8 +4642,8 @@
         </p:nvSpPr>
         <p:spPr>
           <a:xfrm>
-            <a:off x="594360" y="2560320"/>
-            <a:ext cx="11002975" cy="384048"/>
+            <a:off x="640080" y="2418588"/>
+            <a:ext cx="10911535" cy="365760"/>
           </a:xfrm>
           <a:prstGeom prst="rect">
             <a:avLst/>
@@ -5150,7 +4660,7 @@
             <a:r>
               <a:rPr sz="2400" b="0" i="1">
                 <a:solidFill>
-                  <a:srgbClr val="B4B4B4"/>
+                  <a:srgbClr val="AAAAAA"/>
                 </a:solidFill>
                 <a:latin typeface="Arial"/>
               </a:rPr>
@@ -5167,8 +4677,8 @@
         </p:nvSpPr>
         <p:spPr>
           <a:xfrm>
-            <a:off x="594360" y="2980944"/>
-            <a:ext cx="11002975" cy="347472"/>
+            <a:off x="640080" y="2985516"/>
+            <a:ext cx="10911535" cy="731520"/>
           </a:xfrm>
           <a:prstGeom prst="rect">
             <a:avLst/>
@@ -5183,13 +4693,13 @@
           <a:p>
             <a:pPr algn="ctr"/>
             <a:r>
-              <a:rPr sz="2000" b="0" i="1">
-                <a:solidFill>
-                  <a:srgbClr val="8C8C8C"/>
+              <a:rPr sz="4800" b="1" i="0">
+                <a:solidFill>
+                  <a:srgbClr val="FFFFFF"/>
                 </a:solidFill>
                 <a:latin typeface="Arial"/>
               </a:rPr>
-              <a:t/>
+              <a:t>やまもこえ たにこえ</a:t>
             </a:r>
           </a:p>
         </p:txBody>
@@ -5202,8 +4712,8 @@
         </p:nvSpPr>
         <p:spPr>
           <a:xfrm>
-            <a:off x="594360" y="3529584"/>
-            <a:ext cx="11002975" cy="685800"/>
+            <a:off x="640080" y="3753612"/>
+            <a:ext cx="10911535" cy="365760"/>
           </a:xfrm>
           <a:prstGeom prst="rect">
             <a:avLst/>
@@ -5218,83 +4728,13 @@
           <a:p>
             <a:pPr algn="ctr"/>
             <a:r>
-              <a:rPr sz="4400" b="1" i="0">
-                <a:solidFill>
-                  <a:srgbClr val="FFFFFF"/>
-                </a:solidFill>
-                <a:latin typeface="Arial"/>
-              </a:rPr>
-              <a:t>やまもこえ たにこえ</a:t>
-            </a:r>
-          </a:p>
-        </p:txBody>
-      </p:sp>
-      <p:sp>
-        <p:nvSpPr>
-          <p:cNvPr id="6" name="TextBox 5"/>
-          <p:cNvSpPr txBox="1"/>
-          <p:nvPr/>
-        </p:nvSpPr>
-        <p:spPr>
-          <a:xfrm>
-            <a:off x="594360" y="4251960"/>
-            <a:ext cx="11002975" cy="384048"/>
-          </a:xfrm>
-          <a:prstGeom prst="rect">
-            <a:avLst/>
-          </a:prstGeom>
-          <a:noFill/>
-        </p:spPr>
-        <p:txBody>
-          <a:bodyPr wrap="square">
-            <a:spAutoFit/>
-          </a:bodyPr>
-          <a:lstStyle/>
-          <a:p>
-            <a:pPr algn="ctr"/>
-            <a:r>
               <a:rPr sz="2400" b="0" i="1">
                 <a:solidFill>
-                  <a:srgbClr val="B4B4B4"/>
+                  <a:srgbClr val="AAAAAA"/>
                 </a:solidFill>
                 <a:latin typeface="Arial"/>
               </a:rPr>
               <a:t>yama mo koeta ni koe</a:t>
-            </a:r>
-          </a:p>
-        </p:txBody>
-      </p:sp>
-      <p:sp>
-        <p:nvSpPr>
-          <p:cNvPr id="7" name="TextBox 6"/>
-          <p:cNvSpPr txBox="1"/>
-          <p:nvPr/>
-        </p:nvSpPr>
-        <p:spPr>
-          <a:xfrm>
-            <a:off x="594360" y="4672584"/>
-            <a:ext cx="11002975" cy="347472"/>
-          </a:xfrm>
-          <a:prstGeom prst="rect">
-            <a:avLst/>
-          </a:prstGeom>
-          <a:noFill/>
-        </p:spPr>
-        <p:txBody>
-          <a:bodyPr wrap="square">
-            <a:spAutoFit/>
-          </a:bodyPr>
-          <a:lstStyle/>
-          <a:p>
-            <a:pPr algn="ctr"/>
-            <a:r>
-              <a:rPr sz="2000" b="0" i="1">
-                <a:solidFill>
-                  <a:srgbClr val="8C8C8C"/>
-                </a:solidFill>
-                <a:latin typeface="Arial"/>
-              </a:rPr>
-              <a:t/>
             </a:r>
           </a:p>
         </p:txBody>

--- a/output_pptx/Go_Tell_It_On_The_Mountain.pptx
+++ b/output_pptx/Go_Tell_It_On_The_Mountain.pptx
@@ -3245,6 +3245,76 @@
           </a:p>
         </p:txBody>
       </p:sp>
+      <p:sp>
+        <p:nvSpPr>
+          <p:cNvPr id="6" name="TextBox 5"/>
+          <p:cNvSpPr txBox="1"/>
+          <p:nvPr/>
+        </p:nvSpPr>
+        <p:spPr>
+          <a:xfrm>
+            <a:off x="640080" y="4530852"/>
+            <a:ext cx="10911535" cy="310896"/>
+          </a:xfrm>
+          <a:prstGeom prst="rect">
+            <a:avLst/>
+          </a:prstGeom>
+          <a:noFill/>
+        </p:spPr>
+        <p:txBody>
+          <a:bodyPr wrap="square">
+            <a:spAutoFit/>
+          </a:bodyPr>
+          <a:lstStyle/>
+          <a:p>
+            <a:pPr algn="ctr"/>
+            <a:r>
+              <a:rPr sz="2000" b="0" i="1">
+                <a:solidFill>
+                  <a:srgbClr val="828282"/>
+                </a:solidFill>
+                <a:latin typeface="Arial"/>
+              </a:rPr>
+              <a:t>Contai e transmiti</a:t>
+            </a:r>
+          </a:p>
+        </p:txBody>
+      </p:sp>
+      <p:sp>
+        <p:nvSpPr>
+          <p:cNvPr id="7" name="TextBox 6"/>
+          <p:cNvSpPr txBox="1"/>
+          <p:nvPr/>
+        </p:nvSpPr>
+        <p:spPr>
+          <a:xfrm>
+            <a:off x="640080" y="4896612"/>
+            <a:ext cx="10911535" cy="310896"/>
+          </a:xfrm>
+          <a:prstGeom prst="rect">
+            <a:avLst/>
+          </a:prstGeom>
+          <a:noFill/>
+        </p:spPr>
+        <p:txBody>
+          <a:bodyPr wrap="square">
+            <a:spAutoFit/>
+          </a:bodyPr>
+          <a:lstStyle/>
+          <a:p>
+            <a:pPr algn="ctr"/>
+            <a:r>
+              <a:rPr sz="2000" b="0" i="1">
+                <a:solidFill>
+                  <a:srgbClr val="828282"/>
+                </a:solidFill>
+                <a:latin typeface="Arial"/>
+              </a:rPr>
+              <a:t>Atravessai as montanhas, atravessai os vales</a:t>
+            </a:r>
+          </a:p>
+        </p:txBody>
+      </p:sp>
     </p:spTree>
   </p:cSld>
   <p:clrMapOvr>
@@ -3411,6 +3481,76 @@
           </a:p>
         </p:txBody>
       </p:sp>
+      <p:sp>
+        <p:nvSpPr>
+          <p:cNvPr id="6" name="TextBox 5"/>
+          <p:cNvSpPr txBox="1"/>
+          <p:nvPr/>
+        </p:nvSpPr>
+        <p:spPr>
+          <a:xfrm>
+            <a:off x="640080" y="4530852"/>
+            <a:ext cx="10911535" cy="310896"/>
+          </a:xfrm>
+          <a:prstGeom prst="rect">
+            <a:avLst/>
+          </a:prstGeom>
+          <a:noFill/>
+        </p:spPr>
+        <p:txBody>
+          <a:bodyPr wrap="square">
+            <a:spAutoFit/>
+          </a:bodyPr>
+          <a:lstStyle/>
+          <a:p>
+            <a:pPr algn="ctr"/>
+            <a:r>
+              <a:rPr sz="2000" b="0" i="1">
+                <a:solidFill>
+                  <a:srgbClr val="828282"/>
+                </a:solidFill>
+                <a:latin typeface="Arial"/>
+              </a:rPr>
+              <a:t>Propagai e espalhrai</a:t>
+            </a:r>
+          </a:p>
+        </p:txBody>
+      </p:sp>
+      <p:sp>
+        <p:nvSpPr>
+          <p:cNvPr id="7" name="TextBox 6"/>
+          <p:cNvSpPr txBox="1"/>
+          <p:nvPr/>
+        </p:nvSpPr>
+        <p:spPr>
+          <a:xfrm>
+            <a:off x="640080" y="4896612"/>
+            <a:ext cx="10911535" cy="310896"/>
+          </a:xfrm>
+          <a:prstGeom prst="rect">
+            <a:avLst/>
+          </a:prstGeom>
+          <a:noFill/>
+        </p:spPr>
+        <p:txBody>
+          <a:bodyPr wrap="square">
+            <a:spAutoFit/>
+          </a:bodyPr>
+          <a:lstStyle/>
+          <a:p>
+            <a:pPr algn="ctr"/>
+            <a:r>
+              <a:rPr sz="2000" b="0" i="1">
+                <a:solidFill>
+                  <a:srgbClr val="828282"/>
+                </a:solidFill>
+                <a:latin typeface="Arial"/>
+              </a:rPr>
+              <a:t>O Senhor veio</a:t>
+            </a:r>
+          </a:p>
+        </p:txBody>
+      </p:sp>
     </p:spTree>
   </p:cSld>
   <p:clrMapOvr>
@@ -3577,6 +3717,76 @@
           </a:p>
         </p:txBody>
       </p:sp>
+      <p:sp>
+        <p:nvSpPr>
+          <p:cNvPr id="6" name="TextBox 5"/>
+          <p:cNvSpPr txBox="1"/>
+          <p:nvPr/>
+        </p:nvSpPr>
+        <p:spPr>
+          <a:xfrm>
+            <a:off x="640080" y="4530852"/>
+            <a:ext cx="10911535" cy="310896"/>
+          </a:xfrm>
+          <a:prstGeom prst="rect">
+            <a:avLst/>
+          </a:prstGeom>
+          <a:noFill/>
+        </p:spPr>
+        <p:txBody>
+          <a:bodyPr wrap="square">
+            <a:spAutoFit/>
+          </a:bodyPr>
+          <a:lstStyle/>
+          <a:p>
+            <a:pPr algn="ctr"/>
+            <a:r>
+              <a:rPr sz="2000" b="0" i="1">
+                <a:solidFill>
+                  <a:srgbClr val="828282"/>
+                </a:solidFill>
+                <a:latin typeface="Arial"/>
+              </a:rPr>
+              <a:t>Propagai e espalhrai</a:t>
+            </a:r>
+          </a:p>
+        </p:txBody>
+      </p:sp>
+      <p:sp>
+        <p:nvSpPr>
+          <p:cNvPr id="7" name="TextBox 6"/>
+          <p:cNvSpPr txBox="1"/>
+          <p:nvPr/>
+        </p:nvSpPr>
+        <p:spPr>
+          <a:xfrm>
+            <a:off x="640080" y="4896612"/>
+            <a:ext cx="10911535" cy="310896"/>
+          </a:xfrm>
+          <a:prstGeom prst="rect">
+            <a:avLst/>
+          </a:prstGeom>
+          <a:noFill/>
+        </p:spPr>
+        <p:txBody>
+          <a:bodyPr wrap="square">
+            <a:spAutoFit/>
+          </a:bodyPr>
+          <a:lstStyle/>
+          <a:p>
+            <a:pPr algn="ctr"/>
+            <a:r>
+              <a:rPr sz="2000" b="0" i="1">
+                <a:solidFill>
+                  <a:srgbClr val="828282"/>
+                </a:solidFill>
+                <a:latin typeface="Arial"/>
+              </a:rPr>
+              <a:t>O Senhor veio</a:t>
+            </a:r>
+          </a:p>
+        </p:txBody>
+      </p:sp>
     </p:spTree>
   </p:cSld>
   <p:clrMapOvr>
@@ -3673,6 +3883,76 @@
           </a:p>
         </p:txBody>
       </p:sp>
+      <p:sp>
+        <p:nvSpPr>
+          <p:cNvPr id="4" name="TextBox 3"/>
+          <p:cNvSpPr txBox="1"/>
+          <p:nvPr/>
+        </p:nvSpPr>
+        <p:spPr>
+          <a:xfrm>
+            <a:off x="640080" y="4128516"/>
+            <a:ext cx="10911535" cy="310896"/>
+          </a:xfrm>
+          <a:prstGeom prst="rect">
+            <a:avLst/>
+          </a:prstGeom>
+          <a:noFill/>
+        </p:spPr>
+        <p:txBody>
+          <a:bodyPr wrap="square">
+            <a:spAutoFit/>
+          </a:bodyPr>
+          <a:lstStyle/>
+          <a:p>
+            <a:pPr algn="ctr"/>
+            <a:r>
+              <a:rPr sz="2000" b="0" i="0">
+                <a:solidFill>
+                  <a:srgbClr val="828282"/>
+                </a:solidFill>
+                <a:latin typeface="Arial"/>
+              </a:rPr>
+              <a:t>山で宣言しよう</a:t>
+            </a:r>
+          </a:p>
+        </p:txBody>
+      </p:sp>
+      <p:sp>
+        <p:nvSpPr>
+          <p:cNvPr id="5" name="TextBox 4"/>
+          <p:cNvSpPr txBox="1"/>
+          <p:nvPr/>
+        </p:nvSpPr>
+        <p:spPr>
+          <a:xfrm>
+            <a:off x="640080" y="4494276"/>
+            <a:ext cx="10911535" cy="310896"/>
+          </a:xfrm>
+          <a:prstGeom prst="rect">
+            <a:avLst/>
+          </a:prstGeom>
+          <a:noFill/>
+        </p:spPr>
+        <p:txBody>
+          <a:bodyPr wrap="square">
+            <a:spAutoFit/>
+          </a:bodyPr>
+          <a:lstStyle/>
+          <a:p>
+            <a:pPr algn="ctr"/>
+            <a:r>
+              <a:rPr sz="2000" b="0" i="0">
+                <a:solidFill>
+                  <a:srgbClr val="828282"/>
+                </a:solidFill>
+                <a:latin typeface="Arial"/>
+              </a:rPr>
+              <a:t>山頂でも、どこにいようとも</a:t>
+            </a:r>
+          </a:p>
+        </p:txBody>
+      </p:sp>
     </p:spTree>
   </p:cSld>
   <p:clrMapOvr>
@@ -3769,6 +4049,76 @@
           </a:p>
         </p:txBody>
       </p:sp>
+      <p:sp>
+        <p:nvSpPr>
+          <p:cNvPr id="4" name="TextBox 3"/>
+          <p:cNvSpPr txBox="1"/>
+          <p:nvPr/>
+        </p:nvSpPr>
+        <p:spPr>
+          <a:xfrm>
+            <a:off x="640080" y="4128516"/>
+            <a:ext cx="10911535" cy="310896"/>
+          </a:xfrm>
+          <a:prstGeom prst="rect">
+            <a:avLst/>
+          </a:prstGeom>
+          <a:noFill/>
+        </p:spPr>
+        <p:txBody>
+          <a:bodyPr wrap="square">
+            <a:spAutoFit/>
+          </a:bodyPr>
+          <a:lstStyle/>
+          <a:p>
+            <a:pPr algn="ctr"/>
+            <a:r>
+              <a:rPr sz="2000" b="0" i="0">
+                <a:solidFill>
+                  <a:srgbClr val="828282"/>
+                </a:solidFill>
+                <a:latin typeface="Arial"/>
+              </a:rPr>
+              <a:t>山で宣言しよう</a:t>
+            </a:r>
+          </a:p>
+        </p:txBody>
+      </p:sp>
+      <p:sp>
+        <p:nvSpPr>
+          <p:cNvPr id="5" name="TextBox 4"/>
+          <p:cNvSpPr txBox="1"/>
+          <p:nvPr/>
+        </p:nvSpPr>
+        <p:spPr>
+          <a:xfrm>
+            <a:off x="640080" y="4494276"/>
+            <a:ext cx="10911535" cy="310896"/>
+          </a:xfrm>
+          <a:prstGeom prst="rect">
+            <a:avLst/>
+          </a:prstGeom>
+          <a:noFill/>
+        </p:spPr>
+        <p:txBody>
+          <a:bodyPr wrap="square">
+            <a:spAutoFit/>
+          </a:bodyPr>
+          <a:lstStyle/>
+          <a:p>
+            <a:pPr algn="ctr"/>
+            <a:r>
+              <a:rPr sz="2000" b="0" i="0">
+                <a:solidFill>
+                  <a:srgbClr val="828282"/>
+                </a:solidFill>
+                <a:latin typeface="Arial"/>
+              </a:rPr>
+              <a:t>キリストはすでに生まれた</a:t>
+            </a:r>
+          </a:p>
+        </p:txBody>
+      </p:sp>
     </p:spTree>
   </p:cSld>
   <p:clrMapOvr>
@@ -4407,6 +4757,76 @@
           </a:p>
         </p:txBody>
       </p:sp>
+      <p:sp>
+        <p:nvSpPr>
+          <p:cNvPr id="6" name="TextBox 5"/>
+          <p:cNvSpPr txBox="1"/>
+          <p:nvPr/>
+        </p:nvSpPr>
+        <p:spPr>
+          <a:xfrm>
+            <a:off x="640080" y="4530852"/>
+            <a:ext cx="10911535" cy="310896"/>
+          </a:xfrm>
+          <a:prstGeom prst="rect">
+            <a:avLst/>
+          </a:prstGeom>
+          <a:noFill/>
+        </p:spPr>
+        <p:txBody>
+          <a:bodyPr wrap="square">
+            <a:spAutoFit/>
+          </a:bodyPr>
+          <a:lstStyle/>
+          <a:p>
+            <a:pPr algn="ctr"/>
+            <a:r>
+              <a:rPr sz="2000" b="0" i="1">
+                <a:solidFill>
+                  <a:srgbClr val="828282"/>
+                </a:solidFill>
+                <a:latin typeface="Arial"/>
+              </a:rPr>
+              <a:t>Contai e transmiti</a:t>
+            </a:r>
+          </a:p>
+        </p:txBody>
+      </p:sp>
+      <p:sp>
+        <p:nvSpPr>
+          <p:cNvPr id="7" name="TextBox 6"/>
+          <p:cNvSpPr txBox="1"/>
+          <p:nvPr/>
+        </p:nvSpPr>
+        <p:spPr>
+          <a:xfrm>
+            <a:off x="640080" y="4896612"/>
+            <a:ext cx="10911535" cy="310896"/>
+          </a:xfrm>
+          <a:prstGeom prst="rect">
+            <a:avLst/>
+          </a:prstGeom>
+          <a:noFill/>
+        </p:spPr>
+        <p:txBody>
+          <a:bodyPr wrap="square">
+            <a:spAutoFit/>
+          </a:bodyPr>
+          <a:lstStyle/>
+          <a:p>
+            <a:pPr algn="ctr"/>
+            <a:r>
+              <a:rPr sz="2000" b="0" i="1">
+                <a:solidFill>
+                  <a:srgbClr val="828282"/>
+                </a:solidFill>
+                <a:latin typeface="Arial"/>
+              </a:rPr>
+              <a:t>Atravessai as montanhas, atravessai os vales</a:t>
+            </a:r>
+          </a:p>
+        </p:txBody>
+      </p:sp>
     </p:spTree>
   </p:cSld>
   <p:clrMapOvr>
@@ -4573,6 +4993,76 @@
           </a:p>
         </p:txBody>
       </p:sp>
+      <p:sp>
+        <p:nvSpPr>
+          <p:cNvPr id="6" name="TextBox 5"/>
+          <p:cNvSpPr txBox="1"/>
+          <p:nvPr/>
+        </p:nvSpPr>
+        <p:spPr>
+          <a:xfrm>
+            <a:off x="640080" y="4530852"/>
+            <a:ext cx="10911535" cy="310896"/>
+          </a:xfrm>
+          <a:prstGeom prst="rect">
+            <a:avLst/>
+          </a:prstGeom>
+          <a:noFill/>
+        </p:spPr>
+        <p:txBody>
+          <a:bodyPr wrap="square">
+            <a:spAutoFit/>
+          </a:bodyPr>
+          <a:lstStyle/>
+          <a:p>
+            <a:pPr algn="ctr"/>
+            <a:r>
+              <a:rPr sz="2000" b="0" i="1">
+                <a:solidFill>
+                  <a:srgbClr val="828282"/>
+                </a:solidFill>
+                <a:latin typeface="Arial"/>
+              </a:rPr>
+              <a:t>Propagai e espalhrai</a:t>
+            </a:r>
+          </a:p>
+        </p:txBody>
+      </p:sp>
+      <p:sp>
+        <p:nvSpPr>
+          <p:cNvPr id="7" name="TextBox 6"/>
+          <p:cNvSpPr txBox="1"/>
+          <p:nvPr/>
+        </p:nvSpPr>
+        <p:spPr>
+          <a:xfrm>
+            <a:off x="640080" y="4896612"/>
+            <a:ext cx="10911535" cy="310896"/>
+          </a:xfrm>
+          <a:prstGeom prst="rect">
+            <a:avLst/>
+          </a:prstGeom>
+          <a:noFill/>
+        </p:spPr>
+        <p:txBody>
+          <a:bodyPr wrap="square">
+            <a:spAutoFit/>
+          </a:bodyPr>
+          <a:lstStyle/>
+          <a:p>
+            <a:pPr algn="ctr"/>
+            <a:r>
+              <a:rPr sz="2000" b="0" i="1">
+                <a:solidFill>
+                  <a:srgbClr val="828282"/>
+                </a:solidFill>
+                <a:latin typeface="Arial"/>
+              </a:rPr>
+              <a:t>O Senhor veio</a:t>
+            </a:r>
+          </a:p>
+        </p:txBody>
+      </p:sp>
     </p:spTree>
   </p:cSld>
   <p:clrMapOvr>
@@ -4735,6 +5225,76 @@
                 <a:latin typeface="Arial"/>
               </a:rPr>
               <a:t>yama mo koeta ni koe</a:t>
+            </a:r>
+          </a:p>
+        </p:txBody>
+      </p:sp>
+      <p:sp>
+        <p:nvSpPr>
+          <p:cNvPr id="6" name="TextBox 5"/>
+          <p:cNvSpPr txBox="1"/>
+          <p:nvPr/>
+        </p:nvSpPr>
+        <p:spPr>
+          <a:xfrm>
+            <a:off x="640080" y="4530852"/>
+            <a:ext cx="10911535" cy="310896"/>
+          </a:xfrm>
+          <a:prstGeom prst="rect">
+            <a:avLst/>
+          </a:prstGeom>
+          <a:noFill/>
+        </p:spPr>
+        <p:txBody>
+          <a:bodyPr wrap="square">
+            <a:spAutoFit/>
+          </a:bodyPr>
+          <a:lstStyle/>
+          <a:p>
+            <a:pPr algn="ctr"/>
+            <a:r>
+              <a:rPr sz="2000" b="0" i="1">
+                <a:solidFill>
+                  <a:srgbClr val="828282"/>
+                </a:solidFill>
+                <a:latin typeface="Arial"/>
+              </a:rPr>
+              <a:t>Contai e transmiti</a:t>
+            </a:r>
+          </a:p>
+        </p:txBody>
+      </p:sp>
+      <p:sp>
+        <p:nvSpPr>
+          <p:cNvPr id="7" name="TextBox 6"/>
+          <p:cNvSpPr txBox="1"/>
+          <p:nvPr/>
+        </p:nvSpPr>
+        <p:spPr>
+          <a:xfrm>
+            <a:off x="640080" y="4896612"/>
+            <a:ext cx="10911535" cy="310896"/>
+          </a:xfrm>
+          <a:prstGeom prst="rect">
+            <a:avLst/>
+          </a:prstGeom>
+          <a:noFill/>
+        </p:spPr>
+        <p:txBody>
+          <a:bodyPr wrap="square">
+            <a:spAutoFit/>
+          </a:bodyPr>
+          <a:lstStyle/>
+          <a:p>
+            <a:pPr algn="ctr"/>
+            <a:r>
+              <a:rPr sz="2000" b="0" i="1">
+                <a:solidFill>
+                  <a:srgbClr val="828282"/>
+                </a:solidFill>
+                <a:latin typeface="Arial"/>
+              </a:rPr>
+              <a:t>Atravessai as montanhas, atravessai os vales</a:t>
             </a:r>
           </a:p>
         </p:txBody>
